--- a/module 7 Packages and Plugins in Flutter/ppt/ppt.pptx
+++ b/module 7 Packages and Plugins in Flutter/ppt/ppt.pptx
@@ -4818,6 +4818,168 @@
 </p:sldLayout>
 </file>
 
+<file path=ppt/slideLayouts/slideLayout12.xml><?xml version="1.0" encoding="utf-8"?>
+<p:sldLayout xmlns:a="http://schemas.openxmlformats.org/drawingml/2006/main" xmlns:r="http://schemas.openxmlformats.org/officeDocument/2006/relationships" xmlns:p="http://schemas.openxmlformats.org/presentationml/2006/main" preserve="1" userDrawn="1">
+  <p:cSld name="仅标题">
+    <p:spTree>
+      <p:nvGrpSpPr>
+        <p:cNvPr id="1" name=""/>
+        <p:cNvGrpSpPr/>
+        <p:nvPr/>
+      </p:nvGrpSpPr>
+      <p:grpSpPr>
+        <a:xfrm>
+          <a:off x="0" y="0"/>
+          <a:ext cx="0" cy="0"/>
+          <a:chOff x="0" y="0"/>
+          <a:chExt cx="0" cy="0"/>
+        </a:xfrm>
+      </p:grpSpPr>
+      <p:sp>
+        <p:nvSpPr>
+          <p:cNvPr id="2" name="标题 1"/>
+          <p:cNvSpPr>
+            <a:spLocks noGrp="1"/>
+          </p:cNvSpPr>
+          <p:nvPr>
+            <p:ph type="title" hasCustomPrompt="1"/>
+            <p:custDataLst>
+              <p:tags r:id="rId2"/>
+            </p:custDataLst>
+          </p:nvPr>
+        </p:nvSpPr>
+        <p:spPr>
+          <a:xfrm>
+            <a:off x="696000" y="394405"/>
+            <a:ext cx="10800000" cy="792000"/>
+          </a:xfrm>
+        </p:spPr>
+        <p:txBody>
+          <a:bodyPr/>
+          <a:lstStyle>
+            <a:lvl1pPr algn="ctr">
+              <a:defRPr sz="3200">
+                <a:solidFill>
+                  <a:schemeClr val="tx1">
+                    <a:lumMod val="85000"/>
+                    <a:lumOff val="15000"/>
+                  </a:schemeClr>
+                </a:solidFill>
+                <a:latin typeface="+mj-lt"/>
+              </a:defRPr>
+            </a:lvl1pPr>
+          </a:lstStyle>
+          <a:p>
+            <a:r>
+              <a:rPr lang="en-US" dirty="0"/>
+              <a:t>Click to add title</a:t>
+            </a:r>
+            <a:endParaRPr lang="en-US" dirty="0"/>
+          </a:p>
+        </p:txBody>
+      </p:sp>
+      <p:sp>
+        <p:nvSpPr>
+          <p:cNvPr id="3" name="日期占位符 2"/>
+          <p:cNvSpPr>
+            <a:spLocks noGrp="1"/>
+          </p:cNvSpPr>
+          <p:nvPr>
+            <p:ph type="dt" sz="half" idx="10"/>
+            <p:custDataLst>
+              <p:tags r:id="rId3"/>
+            </p:custDataLst>
+          </p:nvPr>
+        </p:nvSpPr>
+        <p:spPr/>
+        <p:txBody>
+          <a:bodyPr/>
+          <a:lstStyle>
+            <a:lvl1pPr>
+              <a:defRPr>
+                <a:latin typeface="Arial" panose="020B0604020202020204" pitchFamily="34" charset="0"/>
+                <a:sym typeface="Arial" panose="020B0604020202020204" pitchFamily="34" charset="0"/>
+              </a:defRPr>
+            </a:lvl1pPr>
+          </a:lstStyle>
+          <a:p>
+            <a:r>
+              <a:rPr lang="en-US"/>
+              <a:t>Date Area</a:t>
+            </a:r>
+            <a:endParaRPr lang="en-US"/>
+          </a:p>
+        </p:txBody>
+      </p:sp>
+      <p:sp>
+        <p:nvSpPr>
+          <p:cNvPr id="4" name="页脚占位符 3"/>
+          <p:cNvSpPr>
+            <a:spLocks noGrp="1"/>
+          </p:cNvSpPr>
+          <p:nvPr>
+            <p:ph type="ftr" sz="quarter" idx="11"/>
+            <p:custDataLst>
+              <p:tags r:id="rId4"/>
+            </p:custDataLst>
+          </p:nvPr>
+        </p:nvSpPr>
+        <p:spPr/>
+        <p:txBody>
+          <a:bodyPr/>
+          <a:lstStyle>
+            <a:lvl1pPr>
+              <a:defRPr>
+                <a:latin typeface="Arial" panose="020B0604020202020204" pitchFamily="34" charset="0"/>
+                <a:sym typeface="Arial" panose="020B0604020202020204" pitchFamily="34" charset="0"/>
+              </a:defRPr>
+            </a:lvl1pPr>
+          </a:lstStyle>
+          <a:p>
+            <a:endParaRPr lang="en-US" dirty="0"/>
+          </a:p>
+        </p:txBody>
+      </p:sp>
+      <p:sp>
+        <p:nvSpPr>
+          <p:cNvPr id="5" name="灯片编号占位符 4"/>
+          <p:cNvSpPr>
+            <a:spLocks noGrp="1"/>
+          </p:cNvSpPr>
+          <p:nvPr>
+            <p:ph type="sldNum" sz="quarter" idx="12"/>
+            <p:custDataLst>
+              <p:tags r:id="rId5"/>
+            </p:custDataLst>
+          </p:nvPr>
+        </p:nvSpPr>
+        <p:spPr/>
+        <p:txBody>
+          <a:bodyPr/>
+          <a:lstStyle>
+            <a:lvl1pPr>
+              <a:defRPr>
+                <a:latin typeface="Arial" panose="020B0604020202020204" pitchFamily="34" charset="0"/>
+                <a:sym typeface="Arial" panose="020B0604020202020204" pitchFamily="34" charset="0"/>
+              </a:defRPr>
+            </a:lvl1pPr>
+          </a:lstStyle>
+          <a:p>
+            <a:fld id="{49AE70B2-8BF9-45C0-BB95-33D1B9D3A854}" type="slidenum">
+              <a:rPr lang="en-US" smtClean="0"/>
+            </a:fld>
+            <a:endParaRPr lang="en-US" dirty="0"/>
+          </a:p>
+        </p:txBody>
+      </p:sp>
+    </p:spTree>
+  </p:cSld>
+  <p:clrMapOvr>
+    <a:masterClrMapping/>
+  </p:clrMapOvr>
+</p:sldLayout>
+</file>
+
 <file path=ppt/slideLayouts/slideLayout2.xml><?xml version="1.0" encoding="utf-8"?>
 <p:sldLayout xmlns:a="http://schemas.openxmlformats.org/drawingml/2006/main" xmlns:r="http://schemas.openxmlformats.org/officeDocument/2006/relationships" xmlns:p="http://schemas.openxmlformats.org/presentationml/2006/main" type="obj" preserve="1">
   <p:cSld name="Title and content">
@@ -11805,6 +11967,7 @@
     <p:sldLayoutId id="2147483657" r:id="rId9"/>
     <p:sldLayoutId id="2147483658" r:id="rId10"/>
     <p:sldLayoutId id="2147483659" r:id="rId11"/>
+    <p:sldLayoutId id="2147483660" r:id="rId12"/>
   </p:sldLayoutIdLst>
   <p:hf sldNum="0" hdr="0" ftr="0" dt="0"/>
   <p:txStyles>
@@ -27793,6 +27956,58 @@
 </p:sld>
 </file>
 
+<file path=ppt/tags/tag1.xml><?xml version="1.0" encoding="utf-8"?>
+<p:tagLst xmlns:p="http://schemas.openxmlformats.org/presentationml/2006/main">
+  <p:tag name="KSO_WM_UNIT_HIGHLIGHT" val="0"/>
+  <p:tag name="KSO_WM_UNIT_COMPATIBLE" val="0"/>
+  <p:tag name="KSO_WM_UNIT_DIAGRAM_ISNUMVISUAL" val="0"/>
+  <p:tag name="KSO_WM_UNIT_DIAGRAM_ISREFERUNIT" val="0"/>
+  <p:tag name="KSO_WM_UNIT_ID" val="_1**"/>
+  <p:tag name="KSO_WM_UNIT_LAYERLEVEL" val="1"/>
+  <p:tag name="KSO_WM_TAG_VERSION" val="3.0"/>
+  <p:tag name="KSO_WM_BEAUTIFY_FLAG" val="#wm#"/>
+</p:tagLst>
+</file>
+
+<file path=ppt/tags/tag2.xml><?xml version="1.0" encoding="utf-8"?>
+<p:tagLst xmlns:p="http://schemas.openxmlformats.org/presentationml/2006/main">
+  <p:tag name="KSO_WM_UNIT_HIGHLIGHT" val="0"/>
+  <p:tag name="KSO_WM_UNIT_COMPATIBLE" val="0"/>
+  <p:tag name="KSO_WM_UNIT_DIAGRAM_ISNUMVISUAL" val="0"/>
+  <p:tag name="KSO_WM_UNIT_DIAGRAM_ISREFERUNIT" val="0"/>
+  <p:tag name="KSO_WM_UNIT_ID" val="_1**"/>
+  <p:tag name="KSO_WM_UNIT_LAYERLEVEL" val="1"/>
+  <p:tag name="KSO_WM_TAG_VERSION" val="3.0"/>
+  <p:tag name="KSO_WM_BEAUTIFY_FLAG" val="#wm#"/>
+</p:tagLst>
+</file>
+
+<file path=ppt/tags/tag3.xml><?xml version="1.0" encoding="utf-8"?>
+<p:tagLst xmlns:p="http://schemas.openxmlformats.org/presentationml/2006/main">
+  <p:tag name="KSO_WM_UNIT_HIGHLIGHT" val="0"/>
+  <p:tag name="KSO_WM_UNIT_COMPATIBLE" val="0"/>
+  <p:tag name="KSO_WM_UNIT_DIAGRAM_ISNUMVISUAL" val="0"/>
+  <p:tag name="KSO_WM_UNIT_DIAGRAM_ISREFERUNIT" val="0"/>
+  <p:tag name="KSO_WM_UNIT_ID" val="_1**"/>
+  <p:tag name="KSO_WM_UNIT_LAYERLEVEL" val="1"/>
+  <p:tag name="KSO_WM_TAG_VERSION" val="3.0"/>
+  <p:tag name="KSO_WM_BEAUTIFY_FLAG" val="#wm#"/>
+</p:tagLst>
+</file>
+
+<file path=ppt/tags/tag4.xml><?xml version="1.0" encoding="utf-8"?>
+<p:tagLst xmlns:p="http://schemas.openxmlformats.org/presentationml/2006/main">
+  <p:tag name="KSO_WM_UNIT_HIGHLIGHT" val="0"/>
+  <p:tag name="KSO_WM_UNIT_COMPATIBLE" val="0"/>
+  <p:tag name="KSO_WM_UNIT_DIAGRAM_ISNUMVISUAL" val="0"/>
+  <p:tag name="KSO_WM_UNIT_DIAGRAM_ISREFERUNIT" val="0"/>
+  <p:tag name="KSO_WM_UNIT_ID" val="_1**"/>
+  <p:tag name="KSO_WM_UNIT_LAYERLEVEL" val="1"/>
+  <p:tag name="KSO_WM_TAG_VERSION" val="3.0"/>
+  <p:tag name="KSO_WM_BEAUTIFY_FLAG" val="#wm#"/>
+</p:tagLst>
+</file>
+
 <file path=ppt/theme/theme1.xml><?xml version="1.0" encoding="utf-8"?>
 <a:theme xmlns:a="http://schemas.openxmlformats.org/drawingml/2006/main" name="Office Theme">
   <a:themeElements>
